--- a/PPT/胡丹-0917.pptx
+++ b/PPT/胡丹-0917.pptx
@@ -235,7 +235,7 @@
           <a:p>
             <a:fld id="{D2A48B96-639E-45A3-A0BA-2464DFDB1FAA}" type="datetimeFigureOut">
               <a:rPr lang="zh-CN" altLang="en-US" smtClean="0"/>
-              <a:t>2026/9/16</a:t>
+              <a:t>2026/9/17</a:t>
             </a:fld>
             <a:endParaRPr lang="zh-CN" altLang="en-US"/>
           </a:p>
@@ -625,338 +625,7 @@
           <a:bodyPr/>
           <a:lstStyle/>
           <a:p>
-            <a:r>
-              <a:rPr kumimoji="1" lang="en-US" altLang="zh-CN" dirty="0"/>
-              <a:t>S3</a:t>
-            </a:r>
-            <a:r>
-              <a:rPr kumimoji="1" lang="zh-CN" altLang="en-US" dirty="0"/>
-              <a:t>的目标不是简单地把所有距离近的</a:t>
-            </a:r>
-            <a:r>
-              <a:rPr kumimoji="1" lang="en-US" altLang="zh-CN" dirty="0"/>
-              <a:t>POI</a:t>
-            </a:r>
-            <a:r>
-              <a:rPr kumimoji="1" lang="zh-CN" altLang="en-US" dirty="0"/>
-              <a:t>合在一起，前两层已经组织了共同语义，到了第三层，需要结合局部位置，把容易混淆但确实不同的实体分开，例如同一小区不同楼栋，同一车站不同入口。</a:t>
-            </a:r>
-            <a:endParaRPr kumimoji="1" lang="en-US" altLang="zh-CN" dirty="0"/>
-          </a:p>
-          <a:p>
-            <a:endParaRPr kumimoji="1" lang="en-US" altLang="zh-CN" dirty="0"/>
-          </a:p>
-          <a:p>
-            <a:r>
-              <a:rPr kumimoji="1" lang="zh-CN" altLang="en-US" dirty="0"/>
-              <a:t>局部</a:t>
-            </a:r>
-            <a:r>
-              <a:rPr kumimoji="1" lang="en-US" altLang="zh-CN" dirty="0"/>
-              <a:t>geo view</a:t>
-            </a:r>
-            <a:r>
-              <a:rPr kumimoji="1" lang="zh-CN" altLang="en-US" dirty="0"/>
-              <a:t>，</a:t>
-            </a:r>
-            <a:r>
-              <a:rPr kumimoji="1" lang="en-US" altLang="zh-CN" dirty="0" err="1"/>
-              <a:t>dxdy</a:t>
-            </a:r>
-            <a:r>
-              <a:rPr kumimoji="1" lang="zh-CN" altLang="en-US" dirty="0"/>
-              <a:t>是相对所在</a:t>
-            </a:r>
-            <a:r>
-              <a:rPr kumimoji="1" lang="en-US" altLang="zh-CN" dirty="0"/>
-              <a:t>GID6</a:t>
-            </a:r>
-            <a:r>
-              <a:rPr kumimoji="1" lang="zh-CN" altLang="en-US" dirty="0"/>
-              <a:t>网格中心的位置，</a:t>
-            </a:r>
-            <a:r>
-              <a:rPr kumimoji="1" lang="en-US" altLang="zh-CN" dirty="0"/>
-              <a:t>d</a:t>
-            </a:r>
-            <a:r>
-              <a:rPr kumimoji="1" lang="zh-CN" altLang="en-US" dirty="0"/>
-              <a:t>是相对</a:t>
-            </a:r>
-            <a:r>
-              <a:rPr kumimoji="1" lang="en-US" altLang="zh-CN" dirty="0"/>
-              <a:t>parent</a:t>
-            </a:r>
-            <a:r>
-              <a:rPr kumimoji="1" lang="zh-CN" altLang="en-US" dirty="0"/>
-              <a:t>内</a:t>
-            </a:r>
-            <a:r>
-              <a:rPr kumimoji="1" lang="en-US" altLang="zh-CN" dirty="0"/>
-              <a:t>poi</a:t>
-            </a:r>
-            <a:r>
-              <a:rPr kumimoji="1" lang="zh-CN" altLang="en-US" dirty="0"/>
-              <a:t>中心的距离，</a:t>
-            </a:r>
-            <a:r>
-              <a:rPr kumimoji="1" lang="en-US" altLang="zh-CN" dirty="0"/>
-              <a:t>theta</a:t>
-            </a:r>
-            <a:r>
-              <a:rPr kumimoji="1" lang="zh-CN" altLang="en-US" dirty="0"/>
-              <a:t>相对</a:t>
-            </a:r>
-            <a:r>
-              <a:rPr kumimoji="1" lang="en-US" altLang="zh-CN" dirty="0"/>
-              <a:t>parent</a:t>
-            </a:r>
-            <a:r>
-              <a:rPr kumimoji="1" lang="zh-CN" altLang="en-US" dirty="0"/>
-              <a:t>中心的方向，</a:t>
-            </a:r>
-            <a:r>
-              <a:rPr kumimoji="1" lang="en-US" altLang="zh-CN" dirty="0"/>
-              <a:t>log</a:t>
-            </a:r>
-            <a:r>
-              <a:rPr kumimoji="1" lang="zh-CN" altLang="en-US" dirty="0"/>
-              <a:t>压缩距离尺度，正弦余弦避免角度在一圈首尾处不连续。</a:t>
-            </a:r>
-            <a:endParaRPr kumimoji="1" lang="en-US" altLang="zh-CN" dirty="0"/>
-          </a:p>
-          <a:p>
-            <a:endParaRPr kumimoji="1" lang="en-US" altLang="zh-CN" dirty="0"/>
-          </a:p>
-          <a:p>
-            <a:r>
-              <a:rPr kumimoji="1" lang="zh-CN" altLang="en-US" dirty="0"/>
-              <a:t>困难实体图，是</a:t>
-            </a:r>
-            <a:r>
-              <a:rPr kumimoji="1" lang="en-US" altLang="zh-CN" dirty="0"/>
-              <a:t>POI- POI</a:t>
-            </a:r>
-            <a:r>
-              <a:rPr kumimoji="1" lang="zh-CN" altLang="en-US" dirty="0"/>
-              <a:t>易混淆关系图。</a:t>
-            </a:r>
-            <a:endParaRPr kumimoji="1" lang="en-US" altLang="zh-CN" dirty="0"/>
-          </a:p>
-          <a:p>
-            <a:r>
-              <a:rPr kumimoji="1" lang="zh-CN" altLang="en-US" dirty="0"/>
-              <a:t>同一个完整</a:t>
-            </a:r>
-            <a:r>
-              <a:rPr kumimoji="1" lang="en-US" altLang="zh-CN" dirty="0"/>
-              <a:t>parent</a:t>
-            </a:r>
-            <a:r>
-              <a:rPr kumimoji="1" lang="zh-CN" altLang="en-US" dirty="0"/>
-              <a:t>、同一个细类别、</a:t>
-            </a:r>
-            <a:r>
-              <a:rPr kumimoji="1" lang="en-US" altLang="zh-CN" dirty="0"/>
-              <a:t>BGE</a:t>
-            </a:r>
-            <a:r>
-              <a:rPr kumimoji="1" lang="zh-CN" altLang="en-US" dirty="0"/>
-              <a:t>名称别名地址等复合相似度达到阈值，每个</a:t>
-            </a:r>
-            <a:r>
-              <a:rPr kumimoji="1" lang="en-US" altLang="zh-CN" dirty="0"/>
-              <a:t>POI</a:t>
-            </a:r>
-            <a:r>
-              <a:rPr kumimoji="1" lang="zh-CN" altLang="en-US" dirty="0"/>
-              <a:t>最多保留</a:t>
-            </a:r>
-            <a:r>
-              <a:rPr kumimoji="1" lang="en-US" altLang="zh-CN" dirty="0"/>
-              <a:t>20</a:t>
-            </a:r>
-            <a:r>
-              <a:rPr kumimoji="1" lang="zh-CN" altLang="en-US" dirty="0"/>
-              <a:t>个</a:t>
-            </a:r>
-            <a:endParaRPr kumimoji="1" lang="en-US" altLang="zh-CN" dirty="0"/>
-          </a:p>
-          <a:p>
-            <a:endParaRPr kumimoji="1" lang="en-US" altLang="zh-CN" dirty="0"/>
-          </a:p>
-          <a:p>
-            <a:r>
-              <a:rPr kumimoji="1" lang="en-US" altLang="zh-CN" dirty="0"/>
-              <a:t>J3</a:t>
-            </a:r>
-            <a:r>
-              <a:rPr kumimoji="1" lang="zh-CN" altLang="en-US" dirty="0"/>
-              <a:t>就是三个组成</a:t>
-            </a:r>
-            <a:endParaRPr kumimoji="1" lang="en-US" altLang="zh-CN" dirty="0"/>
-          </a:p>
-          <a:p>
-            <a:r>
-              <a:rPr kumimoji="1" lang="zh-CN" altLang="en-US" dirty="0"/>
-              <a:t>双视图项：保留</a:t>
-            </a:r>
-            <a:r>
-              <a:rPr kumimoji="1" lang="en-US" altLang="zh-CN" dirty="0"/>
-              <a:t>POI</a:t>
-            </a:r>
-            <a:r>
-              <a:rPr kumimoji="1" lang="zh-CN" altLang="en-US" dirty="0"/>
-              <a:t>残差与精确</a:t>
-            </a:r>
-            <a:r>
-              <a:rPr kumimoji="1" lang="en-US" altLang="zh-CN" dirty="0"/>
-              <a:t>Query</a:t>
-            </a:r>
-            <a:r>
-              <a:rPr kumimoji="1" lang="zh-CN" altLang="en-US" dirty="0"/>
-              <a:t>对齐</a:t>
-            </a:r>
-            <a:endParaRPr kumimoji="1" lang="en-US" altLang="zh-CN" dirty="0"/>
-          </a:p>
-          <a:p>
-            <a:r>
-              <a:rPr kumimoji="1" lang="en-US" altLang="zh-CN" dirty="0"/>
-              <a:t>Geo</a:t>
-            </a:r>
-            <a:r>
-              <a:rPr kumimoji="1" lang="zh-CN" altLang="en-US" dirty="0"/>
-              <a:t>项：让编码反映局部相对位置结构</a:t>
-            </a:r>
-            <a:endParaRPr kumimoji="1" lang="en-US" altLang="zh-CN" dirty="0"/>
-          </a:p>
-          <a:p>
-            <a:r>
-              <a:rPr kumimoji="1" lang="en-US" altLang="zh-CN" dirty="0"/>
-              <a:t>Hard</a:t>
-            </a:r>
-            <a:r>
-              <a:rPr kumimoji="1" lang="zh-CN" altLang="en-US" dirty="0"/>
-              <a:t>项：对容易混淆的不同实体，惩罚它们继续使用相同</a:t>
-            </a:r>
-            <a:r>
-              <a:rPr kumimoji="1" lang="en-US" altLang="zh-CN" dirty="0"/>
-              <a:t>S3</a:t>
-            </a:r>
-            <a:br>
-              <a:rPr kumimoji="1" lang="en-US" altLang="zh-CN" dirty="0"/>
-            </a:br>
-            <a:br>
-              <a:rPr kumimoji="1" lang="en-US" altLang="zh-CN" dirty="0"/>
-            </a:br>
-            <a:r>
-              <a:rPr kumimoji="1" lang="zh-CN" altLang="en-US" dirty="0"/>
-              <a:t>当前权重</a:t>
-            </a:r>
-            <a:endParaRPr kumimoji="1" lang="en-US" altLang="zh-CN" dirty="0"/>
-          </a:p>
-          <a:p>
-            <a:r>
-              <a:rPr kumimoji="1" lang="en-US" altLang="zh-CN" dirty="0"/>
-              <a:t>S3</a:t>
-            </a:r>
-            <a:r>
-              <a:rPr kumimoji="1" lang="zh-CN" altLang="en-US" dirty="0"/>
-              <a:t> </a:t>
-            </a:r>
-            <a:r>
-              <a:rPr kumimoji="1" lang="en-US" altLang="zh-CN" dirty="0"/>
-              <a:t>query 0.2 graph 0.2 geo 0.10 hard 0.05</a:t>
-            </a:r>
-            <a:br>
-              <a:rPr kumimoji="1" lang="en-US" altLang="zh-CN" dirty="0"/>
-            </a:br>
-            <a:r>
-              <a:rPr kumimoji="1" lang="zh-CN" altLang="en-US" dirty="0"/>
-              <a:t>代码中</a:t>
-            </a:r>
-            <a:r>
-              <a:rPr kumimoji="1" lang="en-US" altLang="zh-CN" dirty="0"/>
-              <a:t>geo</a:t>
-            </a:r>
-            <a:r>
-              <a:rPr kumimoji="1" lang="zh-CN" altLang="en-US" dirty="0"/>
-              <a:t>代码主要是局部特征与</a:t>
-            </a:r>
-            <a:r>
-              <a:rPr kumimoji="1" lang="en-US" altLang="zh-CN" dirty="0"/>
-              <a:t>Geo</a:t>
-            </a:r>
-            <a:r>
-              <a:rPr kumimoji="1" lang="zh-CN" altLang="en-US" dirty="0"/>
-              <a:t>中心的余弦距离，</a:t>
-            </a:r>
-            <a:r>
-              <a:rPr kumimoji="1" lang="en-US" altLang="zh-CN" dirty="0"/>
-              <a:t>hard</a:t>
-            </a:r>
-            <a:r>
-              <a:rPr kumimoji="1" lang="zh-CN" altLang="en-US" dirty="0"/>
-              <a:t>代码是候选码字与困难邻居撞码的加权比例。</a:t>
-            </a:r>
-            <a:endParaRPr kumimoji="1" lang="en-US" altLang="zh-CN" dirty="0"/>
-          </a:p>
-          <a:p>
-            <a:r>
-              <a:rPr kumimoji="1" lang="en-US" altLang="zh-CN" dirty="0"/>
-              <a:t>Query-poi</a:t>
-            </a:r>
-            <a:r>
-              <a:rPr kumimoji="1" lang="zh-CN" altLang="en-US" dirty="0"/>
-              <a:t> 正向关系鼓励共享</a:t>
-            </a:r>
-            <a:r>
-              <a:rPr kumimoji="1" lang="en-US" altLang="zh-CN" dirty="0"/>
-              <a:t>token</a:t>
-            </a:r>
-            <a:r>
-              <a:rPr kumimoji="1" lang="zh-CN" altLang="en-US" dirty="0"/>
-              <a:t>，困难</a:t>
-            </a:r>
-            <a:r>
-              <a:rPr kumimoji="1" lang="en-US" altLang="zh-CN" dirty="0"/>
-              <a:t>poi-poi</a:t>
-            </a:r>
-            <a:r>
-              <a:rPr kumimoji="1" lang="zh-CN" altLang="en-US" dirty="0"/>
-              <a:t>关系惩罚实体撞码</a:t>
-            </a:r>
-            <a:endParaRPr kumimoji="1" lang="en-US" altLang="zh-CN" dirty="0"/>
-          </a:p>
-          <a:p>
-            <a:r>
-              <a:rPr kumimoji="1" lang="zh-CN" altLang="en-US" dirty="0"/>
-              <a:t>每个</a:t>
-            </a:r>
-            <a:r>
-              <a:rPr kumimoji="1" lang="en-US" altLang="zh-CN" dirty="0"/>
-              <a:t>poi</a:t>
-            </a:r>
-            <a:r>
-              <a:rPr kumimoji="1" lang="zh-CN" altLang="en-US" dirty="0"/>
-              <a:t>只在内容最接近的</a:t>
-            </a:r>
-            <a:r>
-              <a:rPr kumimoji="1" lang="en-US" altLang="zh-CN" dirty="0"/>
-              <a:t>32</a:t>
-            </a:r>
-            <a:r>
-              <a:rPr kumimoji="1" lang="zh-CN" altLang="en-US" dirty="0"/>
-              <a:t>个候选</a:t>
-            </a:r>
-            <a:r>
-              <a:rPr kumimoji="1" lang="en-US" altLang="zh-CN" dirty="0"/>
-              <a:t>S3</a:t>
-            </a:r>
-            <a:r>
-              <a:rPr kumimoji="1" lang="zh-CN" altLang="en-US" dirty="0"/>
-              <a:t>中比较复合代码，防止为了消歧跳到内容完全无关的码字。</a:t>
-            </a:r>
+            <a:endParaRPr kumimoji="1" lang="zh-CN" altLang="en-US" dirty="0"/>
           </a:p>
         </p:txBody>
       </p:sp>
@@ -1040,84 +709,7 @@
           <a:bodyPr/>
           <a:lstStyle/>
           <a:p>
-            <a:r>
-              <a:rPr kumimoji="1" lang="zh-CN" altLang="en-US" dirty="0"/>
-              <a:t>先做</a:t>
-            </a:r>
-            <a:r>
-              <a:rPr kumimoji="1" lang="en-US" altLang="zh-CN" dirty="0"/>
-              <a:t>POI-only</a:t>
-            </a:r>
-            <a:r>
-              <a:rPr kumimoji="1" lang="zh-CN" altLang="en-US" dirty="0"/>
-              <a:t>，作为内容结构的初始化，然后逐层交替更新</a:t>
-            </a:r>
-            <a:r>
-              <a:rPr kumimoji="1" lang="en-US" altLang="zh-CN" dirty="0"/>
-              <a:t>POI</a:t>
-            </a:r>
-            <a:r>
-              <a:rPr kumimoji="1" lang="zh-CN" altLang="en-US" dirty="0"/>
-              <a:t>分配、</a:t>
-            </a:r>
-            <a:r>
-              <a:rPr kumimoji="1" lang="en-US" altLang="zh-CN" dirty="0"/>
-              <a:t>query</a:t>
-            </a:r>
-            <a:r>
-              <a:rPr kumimoji="1" lang="zh-CN" altLang="en-US" dirty="0"/>
-              <a:t>分配和各自的中心。</a:t>
-            </a:r>
-            <a:endParaRPr kumimoji="1" lang="en-US" altLang="zh-CN" dirty="0"/>
-          </a:p>
-          <a:p>
-            <a:endParaRPr kumimoji="1" lang="en-US" altLang="zh-CN" dirty="0"/>
-          </a:p>
-          <a:p>
-            <a:r>
-              <a:rPr kumimoji="1" lang="zh-CN" altLang="en-US" dirty="0"/>
-              <a:t>进行了</a:t>
-            </a:r>
-            <a:r>
-              <a:rPr kumimoji="1" lang="en-US" altLang="zh-CN" dirty="0"/>
-              <a:t>warm-up</a:t>
-            </a:r>
-            <a:r>
-              <a:rPr kumimoji="1" lang="zh-CN" altLang="en-US" dirty="0"/>
-              <a:t>，前两轮类别权重为</a:t>
-            </a:r>
-            <a:r>
-              <a:rPr kumimoji="1" lang="en-US" altLang="zh-CN" dirty="0"/>
-              <a:t>0</a:t>
-            </a:r>
-            <a:r>
-              <a:rPr kumimoji="1" lang="zh-CN" altLang="en-US" dirty="0"/>
-              <a:t>，</a:t>
-            </a:r>
-            <a:r>
-              <a:rPr kumimoji="1" lang="en-US" altLang="zh-CN" dirty="0"/>
-              <a:t>query</a:t>
-            </a:r>
-            <a:r>
-              <a:rPr kumimoji="1" lang="zh-CN" altLang="en-US" dirty="0"/>
-              <a:t>和图权重为目标值的</a:t>
-            </a:r>
-            <a:r>
-              <a:rPr kumimoji="1" lang="en-US" altLang="zh-CN" dirty="0"/>
-              <a:t>50%</a:t>
-            </a:r>
-            <a:r>
-              <a:rPr kumimoji="1" lang="zh-CN" altLang="en-US" dirty="0"/>
-              <a:t>，第</a:t>
-            </a:r>
-            <a:r>
-              <a:rPr kumimoji="1" lang="en-US" altLang="zh-CN" dirty="0"/>
-              <a:t>3-6</a:t>
-            </a:r>
-            <a:r>
-              <a:rPr kumimoji="1" lang="zh-CN" altLang="en-US" dirty="0"/>
-              <a:t>轮逐步打开，避免新监督突然破环初始化的内容结构。</a:t>
-            </a:r>
+            <a:endParaRPr kumimoji="1" lang="zh-CN" altLang="en-US" dirty="0"/>
           </a:p>
         </p:txBody>
       </p:sp>
@@ -1285,49 +877,7 @@
           <a:bodyPr/>
           <a:lstStyle/>
           <a:p>
-            <a:r>
-              <a:rPr kumimoji="1" lang="zh-CN" altLang="en-US" dirty="0"/>
-              <a:t>代码实现：</a:t>
-            </a:r>
-            <a:endParaRPr kumimoji="1" lang="en-US" altLang="zh-CN" dirty="0"/>
-          </a:p>
-          <a:p>
-            <a:r>
-              <a:rPr kumimoji="1" lang="zh-CN" altLang="en-US" dirty="0"/>
-              <a:t>找到展示目标对应的前缀桶。计算该桶全部</a:t>
-            </a:r>
-            <a:r>
-              <a:rPr kumimoji="1" lang="en-US" altLang="zh-CN" dirty="0"/>
-              <a:t>POI</a:t>
-            </a:r>
-            <a:r>
-              <a:rPr kumimoji="1" lang="zh-CN" altLang="en-US" dirty="0"/>
-              <a:t>的平均</a:t>
-            </a:r>
-            <a:r>
-              <a:rPr kumimoji="1" lang="en-US" altLang="zh-CN" dirty="0"/>
-              <a:t>BGE</a:t>
-            </a:r>
-            <a:r>
-              <a:rPr kumimoji="1" lang="zh-CN" altLang="en-US" dirty="0"/>
-              <a:t>向量。两种方法的桶均值放在同一个空间。联合</a:t>
-            </a:r>
-            <a:r>
-              <a:rPr kumimoji="1" lang="en-US" altLang="zh-CN" dirty="0"/>
-              <a:t>PCA</a:t>
-            </a:r>
-            <a:r>
-              <a:rPr kumimoji="1" lang="zh-CN" altLang="en-US" dirty="0"/>
-              <a:t>和</a:t>
-            </a:r>
-            <a:r>
-              <a:rPr kumimoji="1" lang="en-US" altLang="zh-CN" dirty="0"/>
-              <a:t>t-SNE</a:t>
-            </a:r>
-            <a:r>
-              <a:rPr kumimoji="1" lang="zh-CN" altLang="en-US" dirty="0"/>
-              <a:t>分别显示</a:t>
-            </a:r>
+            <a:endParaRPr kumimoji="1" lang="zh-CN" altLang="en-US" dirty="0"/>
           </a:p>
         </p:txBody>
       </p:sp>
@@ -2610,371 +2160,6 @@
           <a:bodyPr/>
           <a:lstStyle/>
           <a:p>
-            <a:r>
-              <a:rPr lang="zh-CN" altLang="en-US" dirty="0"/>
-              <a:t>并不是所有 </a:t>
-            </a:r>
-            <a:r>
-              <a:rPr lang="en-US" altLang="zh-CN" dirty="0"/>
-              <a:t>Query </a:t>
-            </a:r>
-            <a:r>
-              <a:rPr lang="zh-CN" altLang="en-US" dirty="0"/>
-              <a:t>都能确定一个具体 </a:t>
-            </a:r>
-            <a:r>
-              <a:rPr lang="en-US" altLang="zh-CN" dirty="0"/>
-              <a:t>POI</a:t>
-            </a:r>
-            <a:r>
-              <a:rPr lang="zh-CN" altLang="en-US" dirty="0"/>
-              <a:t>。例如类别型 </a:t>
-            </a:r>
-            <a:r>
-              <a:rPr lang="en-US" altLang="zh-CN" dirty="0"/>
-              <a:t>Query </a:t>
-            </a:r>
-            <a:r>
-              <a:rPr lang="zh-CN" altLang="en-US" dirty="0"/>
-              <a:t>可能合理对应多个门店，如果把这些关系都强行监督到完整 </a:t>
-            </a:r>
-            <a:r>
-              <a:rPr lang="en-US" altLang="zh-CN" dirty="0"/>
-              <a:t>SID</a:t>
-            </a:r>
-            <a:r>
-              <a:rPr lang="zh-CN" altLang="en-US" dirty="0"/>
-              <a:t>，就会把需要区分的实体拉到一起。因此，我们不根据 </a:t>
-            </a:r>
-            <a:r>
-              <a:rPr lang="en-US" altLang="zh-CN" dirty="0"/>
-              <a:t>Query </a:t>
-            </a:r>
-            <a:r>
-              <a:rPr lang="zh-CN" altLang="en-US" dirty="0"/>
-              <a:t>长短判断粒度，而是根据训练订单中它实际指向的目标分布，决定监督深度。</a:t>
-            </a:r>
-            <a:endParaRPr lang="en-US" altLang="zh-CN" dirty="0"/>
-          </a:p>
-          <a:p>
-            <a:endParaRPr lang="en-US" altLang="zh-CN" dirty="0"/>
-          </a:p>
-          <a:p>
-            <a:r>
-              <a:rPr lang="zh-CN" altLang="en-US" dirty="0"/>
-              <a:t>第一个公式类别分布。</a:t>
-            </a:r>
-            <a:r>
-              <a:rPr lang="en-US" altLang="zh-CN" dirty="0"/>
-              <a:t>q</a:t>
-            </a:r>
-            <a:r>
-              <a:rPr lang="zh-CN" altLang="en-US" dirty="0"/>
-              <a:t>是一个归一化</a:t>
-            </a:r>
-            <a:r>
-              <a:rPr lang="en-US" altLang="zh-CN" dirty="0"/>
-              <a:t>query</a:t>
-            </a:r>
-            <a:r>
-              <a:rPr lang="zh-CN" altLang="en-US" dirty="0"/>
-              <a:t>，</a:t>
-            </a:r>
-            <a:r>
-              <a:rPr lang="en-US" altLang="zh-CN" dirty="0"/>
-              <a:t>p</a:t>
-            </a:r>
-            <a:r>
-              <a:rPr lang="zh-CN" altLang="en-US" dirty="0"/>
-              <a:t>是</a:t>
-            </a:r>
-            <a:r>
-              <a:rPr lang="en-US" altLang="zh-CN" dirty="0"/>
-              <a:t>poi</a:t>
-            </a:r>
-            <a:r>
-              <a:rPr lang="zh-CN" altLang="en-US" dirty="0"/>
-              <a:t>，</a:t>
-            </a:r>
-            <a:r>
-              <a:rPr lang="en-US" altLang="zh-CN" dirty="0"/>
-              <a:t>P(</a:t>
-            </a:r>
-            <a:r>
-              <a:rPr lang="en-US" altLang="zh-CN" dirty="0" err="1"/>
-              <a:t>p|q</a:t>
-            </a:r>
-            <a:r>
-              <a:rPr lang="en-US" altLang="zh-CN" dirty="0"/>
-              <a:t>)</a:t>
-            </a:r>
-            <a:r>
-              <a:rPr lang="zh-CN" altLang="en-US" dirty="0"/>
-              <a:t>是这个</a:t>
-            </a:r>
-            <a:r>
-              <a:rPr lang="en-US" altLang="zh-CN" dirty="0"/>
-              <a:t>query</a:t>
-            </a:r>
-            <a:r>
-              <a:rPr lang="zh-CN" altLang="en-US" dirty="0"/>
-              <a:t>的订单中，目标为</a:t>
-            </a:r>
-            <a:r>
-              <a:rPr lang="en-US" altLang="zh-CN" dirty="0"/>
-              <a:t>poi(p)</a:t>
-            </a:r>
-            <a:r>
-              <a:rPr lang="zh-CN" altLang="en-US" dirty="0"/>
-              <a:t>的比例，</a:t>
-            </a:r>
-            <a:r>
-              <a:rPr lang="en-US" altLang="zh-CN" dirty="0"/>
-              <a:t>c</a:t>
-            </a:r>
-            <a:r>
-              <a:rPr lang="zh-CN" altLang="en-US" dirty="0"/>
-              <a:t>是某一粒度的类别，</a:t>
-            </a:r>
-            <a:r>
-              <a:rPr lang="en-US" altLang="zh-CN" dirty="0"/>
-              <a:t>P(</a:t>
-            </a:r>
-            <a:r>
-              <a:rPr lang="en-US" altLang="zh-CN" dirty="0" err="1"/>
-              <a:t>c|q</a:t>
-            </a:r>
-            <a:r>
-              <a:rPr lang="en-US" altLang="zh-CN" dirty="0"/>
-              <a:t>)</a:t>
-            </a:r>
-            <a:r>
-              <a:rPr lang="zh-CN" altLang="en-US" dirty="0"/>
-              <a:t>是把属于同一类别的</a:t>
-            </a:r>
-            <a:r>
-              <a:rPr lang="en-US" altLang="zh-CN" dirty="0"/>
-              <a:t>POI</a:t>
-            </a:r>
-            <a:r>
-              <a:rPr lang="zh-CN" altLang="en-US" dirty="0"/>
-              <a:t>概率加起来。</a:t>
-            </a:r>
-            <a:endParaRPr lang="en-US" altLang="zh-CN" dirty="0"/>
-          </a:p>
-          <a:p>
-            <a:r>
-              <a:rPr lang="zh-CN" altLang="en-US" dirty="0"/>
-              <a:t>第二个公式集中度。意思就是目标最多的类别占多少。集中度越高，说明</a:t>
-            </a:r>
-            <a:r>
-              <a:rPr lang="en-US" altLang="zh-CN" dirty="0"/>
-              <a:t>query</a:t>
-            </a:r>
-            <a:r>
-              <a:rPr lang="zh-CN" altLang="en-US" dirty="0"/>
-              <a:t>越明确指向某一类目标。</a:t>
-            </a:r>
-            <a:endParaRPr lang="en-US" altLang="zh-CN" dirty="0"/>
-          </a:p>
-          <a:p>
-            <a:r>
-              <a:rPr lang="zh-CN" altLang="en-US" dirty="0"/>
-              <a:t>第三个公式归一化熵。衡量分布是否分散。全部目标属于一个类别熵为</a:t>
-            </a:r>
-            <a:r>
-              <a:rPr lang="en-US" altLang="zh-CN" dirty="0"/>
-              <a:t>0</a:t>
-            </a:r>
-            <a:r>
-              <a:rPr lang="zh-CN" altLang="en-US" dirty="0"/>
-              <a:t>，多个类别均匀分布，归一化熵接近</a:t>
-            </a:r>
-            <a:r>
-              <a:rPr lang="en-US" altLang="zh-CN" dirty="0"/>
-              <a:t>1</a:t>
-            </a:r>
-            <a:r>
-              <a:rPr lang="zh-CN" altLang="en-US" dirty="0"/>
-              <a:t>。越分散越不适合施加监督。</a:t>
-            </a:r>
-            <a:endParaRPr lang="en-US" altLang="zh-CN" dirty="0"/>
-          </a:p>
-          <a:p>
-            <a:endParaRPr lang="en-US" altLang="zh-CN" dirty="0"/>
-          </a:p>
-          <a:p>
-            <a:r>
-              <a:rPr lang="zh-CN" altLang="en-US" dirty="0"/>
-              <a:t>当前阈值</a:t>
-            </a:r>
-            <a:endParaRPr lang="en-US" altLang="zh-CN" dirty="0"/>
-          </a:p>
-          <a:p>
-            <a:r>
-              <a:rPr lang="en-US" altLang="zh-CN" dirty="0"/>
-              <a:t>D3</a:t>
-            </a:r>
-            <a:r>
-              <a:rPr lang="zh-CN" altLang="en-US" dirty="0"/>
-              <a:t> </a:t>
-            </a:r>
-            <a:r>
-              <a:rPr lang="en-US" altLang="zh-CN" dirty="0"/>
-              <a:t>query</a:t>
-            </a:r>
-            <a:r>
-              <a:rPr lang="zh-CN" altLang="en-US" dirty="0"/>
-              <a:t>次数</a:t>
-            </a:r>
-            <a:r>
-              <a:rPr lang="en-US" altLang="zh-CN" dirty="0"/>
-              <a:t>≧2</a:t>
-            </a:r>
-            <a:r>
-              <a:rPr lang="zh-CN" altLang="en-US" dirty="0"/>
-              <a:t>，主目标次数</a:t>
-            </a:r>
-            <a:r>
-              <a:rPr lang="en-US" altLang="zh-CN" dirty="0"/>
-              <a:t>≧2</a:t>
-            </a:r>
-            <a:r>
-              <a:rPr lang="zh-CN" altLang="en-US" dirty="0"/>
-              <a:t>，主目标占比</a:t>
-            </a:r>
-            <a:r>
-              <a:rPr lang="en-US" altLang="zh-CN" dirty="0"/>
-              <a:t>≧0.75</a:t>
-            </a:r>
-            <a:r>
-              <a:rPr lang="zh-CN" altLang="en-US" dirty="0"/>
-              <a:t>，第一与第二目标占比差</a:t>
-            </a:r>
-            <a:r>
-              <a:rPr lang="en-US" altLang="zh-CN" dirty="0"/>
-              <a:t>≧0.25</a:t>
-            </a:r>
-            <a:r>
-              <a:rPr lang="zh-CN" altLang="en-US" dirty="0"/>
-              <a:t>，归一化熵</a:t>
-            </a:r>
-            <a:r>
-              <a:rPr lang="en-US" altLang="zh-CN" dirty="0"/>
-              <a:t>≦0.55</a:t>
-            </a:r>
-          </a:p>
-          <a:p>
-            <a:pPr marL="0" marR="0" lvl="0" indent="0" algn="l" defTabSz="914400" rtl="0" eaLnBrk="1" fontAlgn="auto" latinLnBrk="0" hangingPunct="1">
-              <a:lnSpc>
-                <a:spcPct val="100000"/>
-              </a:lnSpc>
-              <a:spcBef>
-                <a:spcPts val="0"/>
-              </a:spcBef>
-              <a:spcAft>
-                <a:spcPts val="0"/>
-              </a:spcAft>
-              <a:buClrTx/>
-              <a:buSzTx/>
-              <a:buFontTx/>
-              <a:buNone/>
-              <a:tabLst/>
-              <a:defRPr/>
-            </a:pPr>
-            <a:r>
-              <a:rPr lang="en-US" altLang="zh-CN" dirty="0"/>
-              <a:t>D2</a:t>
-            </a:r>
-            <a:r>
-              <a:rPr lang="zh-CN" altLang="en-US" dirty="0"/>
-              <a:t> </a:t>
-            </a:r>
-            <a:r>
-              <a:rPr lang="en-US" altLang="zh-CN" dirty="0"/>
-              <a:t>query</a:t>
-            </a:r>
-            <a:r>
-              <a:rPr lang="zh-CN" altLang="en-US" dirty="0"/>
-              <a:t>次数</a:t>
-            </a:r>
-            <a:r>
-              <a:rPr lang="en-US" altLang="zh-CN" dirty="0"/>
-              <a:t>≧3</a:t>
-            </a:r>
-            <a:r>
-              <a:rPr lang="zh-CN" altLang="en-US" dirty="0"/>
-              <a:t>，细类别集中度</a:t>
-            </a:r>
-            <a:r>
-              <a:rPr lang="en-US" altLang="zh-CN" dirty="0"/>
-              <a:t>≧0.80</a:t>
-            </a:r>
-            <a:r>
-              <a:rPr lang="zh-CN" altLang="en-US" dirty="0"/>
-              <a:t>，熵</a:t>
-            </a:r>
-            <a:r>
-              <a:rPr lang="en-US" altLang="zh-CN" dirty="0"/>
-              <a:t>≦0.40</a:t>
-            </a:r>
-          </a:p>
-          <a:p>
-            <a:pPr marL="0" marR="0" lvl="0" indent="0" algn="l" defTabSz="914400" rtl="0" eaLnBrk="1" fontAlgn="auto" latinLnBrk="0" hangingPunct="1">
-              <a:lnSpc>
-                <a:spcPct val="100000"/>
-              </a:lnSpc>
-              <a:spcBef>
-                <a:spcPts val="0"/>
-              </a:spcBef>
-              <a:spcAft>
-                <a:spcPts val="0"/>
-              </a:spcAft>
-              <a:buClrTx/>
-              <a:buSzTx/>
-              <a:buFontTx/>
-              <a:buNone/>
-              <a:tabLst/>
-              <a:defRPr/>
-            </a:pPr>
-            <a:r>
-              <a:rPr lang="en-US" altLang="zh-CN" dirty="0"/>
-              <a:t>D1</a:t>
-            </a:r>
-            <a:r>
-              <a:rPr lang="zh-CN" altLang="en-US" dirty="0"/>
-              <a:t> </a:t>
-            </a:r>
-            <a:r>
-              <a:rPr lang="en-US" altLang="zh-CN" dirty="0"/>
-              <a:t>query</a:t>
-            </a:r>
-            <a:r>
-              <a:rPr lang="zh-CN" altLang="en-US" dirty="0"/>
-              <a:t>次数</a:t>
-            </a:r>
-            <a:r>
-              <a:rPr lang="en-US" altLang="zh-CN" dirty="0"/>
-              <a:t>≧3</a:t>
-            </a:r>
-            <a:r>
-              <a:rPr lang="zh-CN" altLang="en-US" dirty="0"/>
-              <a:t>，粗类别集中度</a:t>
-            </a:r>
-            <a:r>
-              <a:rPr lang="en-US" altLang="zh-CN" dirty="0"/>
-              <a:t>≧0.85</a:t>
-            </a:r>
-            <a:r>
-              <a:rPr lang="zh-CN" altLang="en-US" dirty="0"/>
-              <a:t>，熵</a:t>
-            </a:r>
-            <a:r>
-              <a:rPr lang="en-US" altLang="zh-CN" dirty="0"/>
-              <a:t>≦0.35</a:t>
-            </a:r>
-          </a:p>
-          <a:p>
             <a:endParaRPr lang="en-US" altLang="zh-CN" dirty="0"/>
           </a:p>
         </p:txBody>
@@ -3059,193 +2244,6 @@
           <a:bodyPr/>
           <a:lstStyle/>
           <a:p>
-            <a:r>
-              <a:rPr kumimoji="1" lang="zh-CN" altLang="en-US" dirty="0"/>
-              <a:t>即使一个</a:t>
-            </a:r>
-            <a:r>
-              <a:rPr kumimoji="1" lang="en-US" altLang="zh-CN" dirty="0"/>
-              <a:t>query</a:t>
-            </a:r>
-            <a:r>
-              <a:rPr kumimoji="1" lang="zh-CN" altLang="en-US" dirty="0"/>
-              <a:t>可以监督某一层，它应该有多大的影响？</a:t>
-            </a:r>
-            <a:endParaRPr kumimoji="1" lang="en-US" altLang="zh-CN" dirty="0"/>
-          </a:p>
-          <a:p>
-            <a:r>
-              <a:rPr kumimoji="1" lang="zh-CN" altLang="en-US" dirty="0"/>
-              <a:t>我们既考虑</a:t>
-            </a:r>
-            <a:r>
-              <a:rPr kumimoji="1" lang="en-US" altLang="zh-CN" dirty="0"/>
-              <a:t>query</a:t>
-            </a:r>
-            <a:r>
-              <a:rPr kumimoji="1" lang="zh-CN" altLang="en-US" dirty="0"/>
-              <a:t>出现了多少次也考虑它的目标有多集中。每个</a:t>
-            </a:r>
-            <a:r>
-              <a:rPr kumimoji="1" lang="en-US" altLang="zh-CN" dirty="0"/>
-              <a:t>query</a:t>
-            </a:r>
-            <a:r>
-              <a:rPr kumimoji="1" lang="zh-CN" altLang="en-US" dirty="0"/>
-              <a:t>的总监督强度有上限，把这份强度分给它的有效目标</a:t>
-            </a:r>
-            <a:r>
-              <a:rPr kumimoji="1" lang="en-US" altLang="zh-CN" dirty="0"/>
-              <a:t>POI</a:t>
-            </a:r>
-            <a:r>
-              <a:rPr kumimoji="1" lang="zh-CN" altLang="en-US" dirty="0"/>
-              <a:t>，避免热门</a:t>
-            </a:r>
-            <a:r>
-              <a:rPr kumimoji="1" lang="en-US" altLang="zh-CN" dirty="0"/>
-              <a:t>query</a:t>
-            </a:r>
-            <a:r>
-              <a:rPr kumimoji="1" lang="zh-CN" altLang="en-US" dirty="0"/>
-              <a:t>或多目标</a:t>
-            </a:r>
-            <a:r>
-              <a:rPr kumimoji="1" lang="en-US" altLang="zh-CN" dirty="0"/>
-              <a:t>query</a:t>
-            </a:r>
-            <a:r>
-              <a:rPr kumimoji="1" lang="zh-CN" altLang="en-US" dirty="0"/>
-              <a:t>产生过大的影响。</a:t>
-            </a:r>
-            <a:endParaRPr kumimoji="1" lang="en-US" altLang="zh-CN" dirty="0"/>
-          </a:p>
-          <a:p>
-            <a:endParaRPr kumimoji="1" lang="en-US" altLang="zh-CN" dirty="0"/>
-          </a:p>
-          <a:p>
-            <a:r>
-              <a:rPr kumimoji="1" lang="zh-CN" altLang="en-US" dirty="0"/>
-              <a:t>可靠性公式，由三个部分组成，分别是支持度、集中度和低歧义程度。</a:t>
-            </a:r>
-            <a:endParaRPr kumimoji="1" lang="en-US" altLang="zh-CN" dirty="0"/>
-          </a:p>
-          <a:p>
-            <a:r>
-              <a:rPr kumimoji="1" lang="zh-CN" altLang="en-US" dirty="0"/>
-              <a:t>支持度：出现次数越多，统计更可信。使用对数压缩，</a:t>
-            </a:r>
-            <a:r>
-              <a:rPr kumimoji="1" lang="en-US" altLang="zh-CN" dirty="0"/>
-              <a:t>20</a:t>
-            </a:r>
-            <a:r>
-              <a:rPr kumimoji="1" lang="zh-CN" altLang="en-US" dirty="0"/>
-              <a:t>次以后不再增加。</a:t>
-            </a:r>
-            <a:endParaRPr kumimoji="1" lang="en-US" altLang="zh-CN" dirty="0"/>
-          </a:p>
-          <a:p>
-            <a:r>
-              <a:rPr kumimoji="1" lang="zh-CN" altLang="en-US" dirty="0"/>
-              <a:t>集中度：目标越集中，监督越强。</a:t>
-            </a:r>
-            <a:endParaRPr kumimoji="1" lang="en-US" altLang="zh-CN" dirty="0"/>
-          </a:p>
-          <a:p>
-            <a:r>
-              <a:rPr kumimoji="1" lang="zh-CN" altLang="en-US" dirty="0"/>
-              <a:t>低歧义程度：熵越小，</a:t>
-            </a:r>
-            <a:r>
-              <a:rPr kumimoji="1" lang="en-US" altLang="zh-CN" dirty="0"/>
-              <a:t>1-H</a:t>
-            </a:r>
-            <a:r>
-              <a:rPr kumimoji="1" lang="zh-CN" altLang="en-US" dirty="0"/>
-              <a:t>越大。</a:t>
-            </a:r>
-            <a:endParaRPr kumimoji="1" lang="en-US" altLang="zh-CN" dirty="0"/>
-          </a:p>
-          <a:p>
-            <a:endParaRPr kumimoji="1" lang="en-US" altLang="zh-CN" dirty="0"/>
-          </a:p>
-          <a:p>
-            <a:r>
-              <a:rPr kumimoji="1" lang="zh-CN" altLang="en-US" dirty="0"/>
-              <a:t>边概率和边权。</a:t>
-            </a:r>
-            <a:endParaRPr kumimoji="1" lang="en-US" altLang="zh-CN" dirty="0"/>
-          </a:p>
-          <a:p>
-            <a:r>
-              <a:rPr kumimoji="1" lang="zh-CN" altLang="en-US" dirty="0"/>
-              <a:t>假设一个</a:t>
-            </a:r>
-            <a:r>
-              <a:rPr kumimoji="1" lang="en-US" altLang="zh-CN" dirty="0"/>
-              <a:t>query</a:t>
-            </a:r>
-            <a:r>
-              <a:rPr kumimoji="1" lang="zh-CN" altLang="en-US" dirty="0"/>
-              <a:t>可靠性是</a:t>
-            </a:r>
-            <a:r>
-              <a:rPr kumimoji="1" lang="en-US" altLang="zh-CN" dirty="0"/>
-              <a:t>0.8</a:t>
-            </a:r>
-            <a:r>
-              <a:rPr kumimoji="1" lang="zh-CN" altLang="en-US" dirty="0"/>
-              <a:t>，两条有效目标边订单占比是</a:t>
-            </a:r>
-            <a:r>
-              <a:rPr kumimoji="1" lang="en-US" altLang="zh-CN" dirty="0"/>
-              <a:t>3:1</a:t>
-            </a:r>
-            <a:r>
-              <a:rPr kumimoji="1" lang="zh-CN" altLang="en-US" dirty="0"/>
-              <a:t>，那边边权分别是</a:t>
-            </a:r>
-            <a:r>
-              <a:rPr kumimoji="1" lang="en-US" altLang="zh-CN" dirty="0"/>
-              <a:t>0.6</a:t>
-            </a:r>
-            <a:r>
-              <a:rPr kumimoji="1" lang="zh-CN" altLang="en-US" dirty="0"/>
-              <a:t>、</a:t>
-            </a:r>
-            <a:r>
-              <a:rPr kumimoji="1" lang="en-US" altLang="zh-CN" dirty="0"/>
-              <a:t>0.2</a:t>
-            </a:r>
-            <a:r>
-              <a:rPr kumimoji="1" lang="zh-CN" altLang="en-US" dirty="0"/>
-              <a:t>，总和仍然是</a:t>
-            </a:r>
-            <a:r>
-              <a:rPr kumimoji="1" lang="en-US" altLang="zh-CN" dirty="0"/>
-              <a:t>0.8</a:t>
-            </a:r>
-            <a:r>
-              <a:rPr kumimoji="1" lang="zh-CN" altLang="en-US" dirty="0"/>
-              <a:t>，不会让</a:t>
-            </a:r>
-            <a:r>
-              <a:rPr kumimoji="1" lang="en-US" altLang="zh-CN" dirty="0"/>
-              <a:t>query</a:t>
-            </a:r>
-            <a:r>
-              <a:rPr kumimoji="1" lang="zh-CN" altLang="en-US" dirty="0"/>
-              <a:t>因为连接两个</a:t>
-            </a:r>
-            <a:r>
-              <a:rPr kumimoji="1" lang="en-US" altLang="zh-CN" dirty="0"/>
-              <a:t>POI</a:t>
-            </a:r>
-            <a:r>
-              <a:rPr kumimoji="1" lang="zh-CN" altLang="en-US" dirty="0"/>
-              <a:t>就翻倍</a:t>
-            </a:r>
             <a:endParaRPr kumimoji="1" lang="en-US" altLang="zh-CN" dirty="0"/>
           </a:p>
         </p:txBody>
@@ -3330,416 +2328,6 @@
           <a:bodyPr/>
           <a:lstStyle/>
           <a:p>
-            <a:r>
-              <a:rPr kumimoji="1" lang="en-US" altLang="zh-CN" dirty="0"/>
-              <a:t>Query</a:t>
-            </a:r>
-            <a:r>
-              <a:rPr kumimoji="1" lang="zh-CN" altLang="en-US" dirty="0"/>
-              <a:t>通常是短表达，</a:t>
-            </a:r>
-            <a:r>
-              <a:rPr kumimoji="1" lang="en-US" altLang="zh-CN" dirty="0"/>
-              <a:t>poi</a:t>
-            </a:r>
-            <a:r>
-              <a:rPr kumimoji="1" lang="zh-CN" altLang="en-US" dirty="0"/>
-              <a:t>是名称、地址、别名组成的完整描述，两者可以表达相关意图，但不一定适合强行共享同一个连续向量中心。所以我们分别学习</a:t>
-            </a:r>
-            <a:r>
-              <a:rPr kumimoji="1" lang="en-US" altLang="zh-CN" dirty="0"/>
-              <a:t>POI</a:t>
-            </a:r>
-            <a:r>
-              <a:rPr kumimoji="1" lang="zh-CN" altLang="en-US" dirty="0"/>
-              <a:t>中心和</a:t>
-            </a:r>
-            <a:r>
-              <a:rPr kumimoji="1" lang="en-US" altLang="zh-CN" dirty="0"/>
-              <a:t>Query</a:t>
-            </a:r>
-            <a:r>
-              <a:rPr kumimoji="1" lang="zh-CN" altLang="en-US" dirty="0"/>
-              <a:t>中心，但让它共享同一个离散</a:t>
-            </a:r>
-            <a:r>
-              <a:rPr kumimoji="1" lang="en-US" altLang="zh-CN" dirty="0"/>
-              <a:t>token</a:t>
-            </a:r>
-            <a:r>
-              <a:rPr kumimoji="1" lang="zh-CN" altLang="en-US" dirty="0"/>
-              <a:t>编号。</a:t>
-            </a:r>
-            <a:endParaRPr kumimoji="1" lang="en-US" altLang="zh-CN" dirty="0"/>
-          </a:p>
-          <a:p>
-            <a:r>
-              <a:rPr kumimoji="1" lang="zh-CN" altLang="en-US" dirty="0"/>
-              <a:t>两种不同表达空间，通过相同的离散编号建立对应。</a:t>
-            </a:r>
-            <a:endParaRPr kumimoji="1" lang="en-US" altLang="zh-CN" dirty="0"/>
-          </a:p>
-          <a:p>
-            <a:endParaRPr kumimoji="1" lang="en-US" altLang="zh-CN" dirty="0"/>
-          </a:p>
-          <a:p>
-            <a:r>
-              <a:rPr kumimoji="1" lang="zh-CN" altLang="en-US" dirty="0"/>
-              <a:t>总目标有四项，</a:t>
-            </a:r>
-            <a:r>
-              <a:rPr kumimoji="1" lang="en-US" altLang="zh-CN" dirty="0" err="1"/>
-              <a:t>s_p</a:t>
-            </a:r>
-            <a:r>
-              <a:rPr kumimoji="1" lang="zh-CN" altLang="en-US" dirty="0"/>
-              <a:t>是</a:t>
-            </a:r>
-            <a:r>
-              <a:rPr kumimoji="1" lang="en-US" altLang="zh-CN" dirty="0"/>
-              <a:t>poi</a:t>
-            </a:r>
-            <a:r>
-              <a:rPr kumimoji="1" lang="zh-CN" altLang="en-US" dirty="0"/>
-              <a:t>当前分到的码字编号，</a:t>
-            </a:r>
-            <a:r>
-              <a:rPr kumimoji="1" lang="en-US" altLang="zh-CN" dirty="0" err="1"/>
-              <a:t>t_q</a:t>
-            </a:r>
-            <a:r>
-              <a:rPr kumimoji="1" lang="zh-CN" altLang="en-US" dirty="0"/>
-              <a:t>是</a:t>
-            </a:r>
-            <a:r>
-              <a:rPr kumimoji="1" lang="en-US" altLang="zh-CN" dirty="0"/>
-              <a:t>query</a:t>
-            </a:r>
-            <a:r>
-              <a:rPr kumimoji="1" lang="zh-CN" altLang="en-US" dirty="0"/>
-              <a:t>当前分到的码字编号。</a:t>
-            </a:r>
-            <a:r>
-              <a:rPr kumimoji="1" lang="en-US" altLang="zh-CN" dirty="0" err="1"/>
-              <a:t>U_l</a:t>
-            </a:r>
-            <a:r>
-              <a:rPr kumimoji="1" lang="zh-CN" altLang="en-US" dirty="0"/>
-              <a:t>和</a:t>
-            </a:r>
-            <a:r>
-              <a:rPr kumimoji="1" lang="en-US" altLang="zh-CN" dirty="0" err="1"/>
-              <a:t>V_l</a:t>
-            </a:r>
-            <a:r>
-              <a:rPr kumimoji="1" lang="zh-CN" altLang="en-US" dirty="0"/>
-              <a:t>是两套中心。</a:t>
-            </a:r>
-            <a:r>
-              <a:rPr kumimoji="1" lang="en-US" altLang="zh-CN" dirty="0"/>
-              <a:t>d</a:t>
-            </a:r>
-            <a:r>
-              <a:rPr kumimoji="1" lang="zh-CN" altLang="en-US" dirty="0"/>
-              <a:t>主要是余弦距离。</a:t>
-            </a:r>
-            <a:endParaRPr kumimoji="1" lang="en-US" altLang="zh-CN" dirty="0"/>
-          </a:p>
-          <a:p>
-            <a:r>
-              <a:rPr kumimoji="1" lang="zh-CN" altLang="en-US" dirty="0"/>
-              <a:t>第一项：保留</a:t>
-            </a:r>
-            <a:r>
-              <a:rPr kumimoji="1" lang="en-US" altLang="zh-CN" dirty="0"/>
-              <a:t>POI</a:t>
-            </a:r>
-            <a:r>
-              <a:rPr kumimoji="1" lang="zh-CN" altLang="en-US" dirty="0"/>
-              <a:t>内容结构。</a:t>
-            </a:r>
-            <a:r>
-              <a:rPr kumimoji="1" lang="en-US" altLang="zh-CN" dirty="0"/>
-              <a:t>POI</a:t>
-            </a:r>
-            <a:r>
-              <a:rPr kumimoji="1" lang="zh-CN" altLang="en-US" dirty="0"/>
-              <a:t>不能为了满足监督，跑到与自身内容完全不相关的码字</a:t>
-            </a:r>
-            <a:endParaRPr kumimoji="1" lang="en-US" altLang="zh-CN" dirty="0"/>
-          </a:p>
-          <a:p>
-            <a:r>
-              <a:rPr kumimoji="1" lang="zh-CN" altLang="en-US" dirty="0"/>
-              <a:t>第二项：保留</a:t>
-            </a:r>
-            <a:r>
-              <a:rPr kumimoji="1" lang="en-US" altLang="zh-CN" dirty="0"/>
-              <a:t>Query</a:t>
-            </a:r>
-            <a:r>
-              <a:rPr kumimoji="1" lang="zh-CN" altLang="en-US" dirty="0"/>
-              <a:t>自身几何。</a:t>
-            </a:r>
-            <a:r>
-              <a:rPr kumimoji="1" lang="en-US" altLang="zh-CN" dirty="0"/>
-              <a:t>Query</a:t>
-            </a:r>
-            <a:r>
-              <a:rPr kumimoji="1" lang="zh-CN" altLang="en-US" dirty="0"/>
-              <a:t>分配也应该能由其表示解释，不能只依赖图关系强行指定编号。</a:t>
-            </a:r>
-            <a:endParaRPr kumimoji="1" lang="en-US" altLang="zh-CN" dirty="0"/>
-          </a:p>
-          <a:p>
-            <a:r>
-              <a:rPr kumimoji="1" lang="zh-CN" altLang="en-US" dirty="0"/>
-              <a:t>第三项：</a:t>
-            </a:r>
-            <a:r>
-              <a:rPr kumimoji="1" lang="en-US" altLang="zh-CN" dirty="0"/>
-              <a:t>Query-POI</a:t>
-            </a:r>
-            <a:r>
-              <a:rPr kumimoji="1" lang="zh-CN" altLang="en-US" dirty="0"/>
-              <a:t>图一致性。相同编号为</a:t>
-            </a:r>
-            <a:r>
-              <a:rPr kumimoji="1" lang="en-US" altLang="zh-CN" dirty="0"/>
-              <a:t>0</a:t>
-            </a:r>
-            <a:r>
-              <a:rPr kumimoji="1" lang="zh-CN" altLang="en-US" dirty="0"/>
-              <a:t>，不同编号为</a:t>
-            </a:r>
-            <a:r>
-              <a:rPr kumimoji="1" lang="en-US" altLang="zh-CN" dirty="0"/>
-              <a:t>1</a:t>
-            </a:r>
-            <a:r>
-              <a:rPr kumimoji="1" lang="zh-CN" altLang="en-US" dirty="0"/>
-              <a:t>，可靠边权越大，分开时的代价越高。它鼓励真实关联的</a:t>
-            </a:r>
-            <a:r>
-              <a:rPr kumimoji="1" lang="en-US" altLang="zh-CN" dirty="0"/>
-              <a:t>Query</a:t>
-            </a:r>
-            <a:r>
-              <a:rPr kumimoji="1" lang="zh-CN" altLang="en-US" dirty="0"/>
-              <a:t>与</a:t>
-            </a:r>
-            <a:r>
-              <a:rPr kumimoji="1" lang="en-US" altLang="zh-CN" dirty="0"/>
-              <a:t>POI</a:t>
-            </a:r>
-            <a:r>
-              <a:rPr kumimoji="1" lang="zh-CN" altLang="en-US" dirty="0"/>
-              <a:t>在对应层使用一致</a:t>
-            </a:r>
-            <a:r>
-              <a:rPr kumimoji="1" lang="en-US" altLang="zh-CN" dirty="0"/>
-              <a:t>token</a:t>
-            </a:r>
-            <a:r>
-              <a:rPr kumimoji="1" lang="zh-CN" altLang="en-US" dirty="0"/>
-              <a:t>，但不是硬性强制。</a:t>
-            </a:r>
-            <a:endParaRPr kumimoji="1" lang="en-US" altLang="zh-CN" dirty="0"/>
-          </a:p>
-          <a:p>
-            <a:r>
-              <a:rPr kumimoji="1" lang="zh-CN" altLang="en-US" dirty="0"/>
-              <a:t>第四项：类别软代价。在不硬绑定类别的前提下，鼓励同一前缀具有更明显的类别结构。</a:t>
-            </a:r>
-            <a:endParaRPr kumimoji="1" lang="en-US" altLang="zh-CN" dirty="0"/>
-          </a:p>
-          <a:p>
-            <a:endParaRPr kumimoji="1" lang="en-US" altLang="zh-CN" dirty="0"/>
-          </a:p>
-          <a:p>
-            <a:r>
-              <a:rPr kumimoji="1" lang="zh-CN" altLang="en-US" dirty="0"/>
-              <a:t>当前权重</a:t>
-            </a:r>
-            <a:endParaRPr kumimoji="1" lang="en-US" altLang="zh-CN" dirty="0"/>
-          </a:p>
-          <a:p>
-            <a:r>
-              <a:rPr kumimoji="1" lang="en-US" altLang="zh-CN" dirty="0"/>
-              <a:t>S1 0.05</a:t>
-            </a:r>
-            <a:r>
-              <a:rPr kumimoji="1" lang="zh-CN" altLang="en-US" dirty="0"/>
-              <a:t> </a:t>
-            </a:r>
-            <a:r>
-              <a:rPr kumimoji="1" lang="en-US" altLang="zh-CN" dirty="0"/>
-              <a:t>0.05</a:t>
-            </a:r>
-            <a:r>
-              <a:rPr kumimoji="1" lang="zh-CN" altLang="en-US" dirty="0"/>
-              <a:t> </a:t>
-            </a:r>
-            <a:r>
-              <a:rPr kumimoji="1" lang="en-US" altLang="zh-CN" dirty="0"/>
-              <a:t>0.08</a:t>
-            </a:r>
-          </a:p>
-          <a:p>
-            <a:r>
-              <a:rPr kumimoji="1" lang="en-US" altLang="zh-CN" dirty="0"/>
-              <a:t>S2</a:t>
-            </a:r>
-            <a:r>
-              <a:rPr kumimoji="1" lang="zh-CN" altLang="en-US" dirty="0"/>
-              <a:t> </a:t>
-            </a:r>
-            <a:r>
-              <a:rPr kumimoji="1" lang="en-US" altLang="zh-CN" dirty="0"/>
-              <a:t>0.10</a:t>
-            </a:r>
-            <a:r>
-              <a:rPr kumimoji="1" lang="zh-CN" altLang="en-US" dirty="0"/>
-              <a:t> </a:t>
-            </a:r>
-            <a:r>
-              <a:rPr kumimoji="1" lang="en-US" altLang="zh-CN" dirty="0"/>
-              <a:t>0.10</a:t>
-            </a:r>
-            <a:r>
-              <a:rPr kumimoji="1" lang="zh-CN" altLang="en-US" dirty="0"/>
-              <a:t> </a:t>
-            </a:r>
-            <a:r>
-              <a:rPr kumimoji="1" lang="en-US" altLang="zh-CN" dirty="0"/>
-              <a:t>0.08</a:t>
-            </a:r>
-          </a:p>
-          <a:p>
-            <a:endParaRPr kumimoji="1" lang="en-US" altLang="zh-CN" dirty="0"/>
-          </a:p>
-          <a:p>
-            <a:r>
-              <a:rPr kumimoji="1" lang="en-US" altLang="zh-CN" dirty="0"/>
-              <a:t>Query</a:t>
-            </a:r>
-            <a:r>
-              <a:rPr kumimoji="1" lang="zh-CN" altLang="en-US" dirty="0"/>
-              <a:t>中心收缩公式，</a:t>
-            </a:r>
-            <a:r>
-              <a:rPr kumimoji="1" lang="en-US" altLang="zh-CN" dirty="0"/>
-              <a:t> </a:t>
-            </a:r>
-            <a:r>
-              <a:rPr kumimoji="1" lang="zh-CN" altLang="en-US" dirty="0"/>
-              <a:t>一个码字下面如果只有很少</a:t>
-            </a:r>
-            <a:r>
-              <a:rPr kumimoji="1" lang="en-US" altLang="zh-CN" dirty="0"/>
-              <a:t>Query</a:t>
-            </a:r>
-            <a:r>
-              <a:rPr kumimoji="1" lang="zh-CN" altLang="en-US" dirty="0"/>
-              <a:t>，直接计算平均值容易不稳定，我们用对应</a:t>
-            </a:r>
-            <a:r>
-              <a:rPr kumimoji="1" lang="en-US" altLang="zh-CN" dirty="0"/>
-              <a:t>POI</a:t>
-            </a:r>
-            <a:r>
-              <a:rPr kumimoji="1" lang="zh-CN" altLang="en-US" dirty="0"/>
-              <a:t>中心作为先验，把稀疏</a:t>
-            </a:r>
-            <a:r>
-              <a:rPr kumimoji="1" lang="en-US" altLang="zh-CN" dirty="0"/>
-              <a:t>Query</a:t>
-            </a:r>
-            <a:r>
-              <a:rPr kumimoji="1" lang="zh-CN" altLang="en-US" dirty="0"/>
-              <a:t>中心适当拉回去。</a:t>
-            </a:r>
-            <a:endParaRPr kumimoji="1" lang="en-US" altLang="zh-CN" dirty="0"/>
-          </a:p>
-          <a:p>
-            <a:r>
-              <a:rPr kumimoji="1" lang="en-US" altLang="zh-CN" dirty="0"/>
-              <a:t>n</a:t>
-            </a:r>
-            <a:r>
-              <a:rPr kumimoji="1" lang="zh-CN" altLang="en-US" dirty="0"/>
-              <a:t>是分到该码字的</a:t>
-            </a:r>
-            <a:r>
-              <a:rPr kumimoji="1" lang="en-US" altLang="zh-CN" dirty="0"/>
-              <a:t>query</a:t>
-            </a:r>
-            <a:r>
-              <a:rPr kumimoji="1" lang="zh-CN" altLang="en-US" dirty="0"/>
-              <a:t>数，</a:t>
-            </a:r>
-            <a:r>
-              <a:rPr kumimoji="1" lang="en-US" altLang="zh-CN" dirty="0"/>
-              <a:t>tau=32</a:t>
-            </a:r>
-            <a:r>
-              <a:rPr kumimoji="1" lang="zh-CN" altLang="en-US" dirty="0"/>
-              <a:t>先验强度。</a:t>
-            </a:r>
-            <a:r>
-              <a:rPr kumimoji="1" lang="en-US" altLang="zh-CN" dirty="0"/>
-              <a:t>Query</a:t>
-            </a:r>
-            <a:r>
-              <a:rPr kumimoji="1" lang="zh-CN" altLang="en-US" dirty="0"/>
-              <a:t>很多时，真实</a:t>
-            </a:r>
-            <a:r>
-              <a:rPr kumimoji="1" lang="en-US" altLang="zh-CN" dirty="0"/>
-              <a:t>query</a:t>
-            </a:r>
-            <a:r>
-              <a:rPr kumimoji="1" lang="zh-CN" altLang="en-US" dirty="0"/>
-              <a:t>数据影响更大。</a:t>
-            </a:r>
-            <a:r>
-              <a:rPr kumimoji="1" lang="en-US" altLang="zh-CN" dirty="0"/>
-              <a:t>Query</a:t>
-            </a:r>
-            <a:r>
-              <a:rPr kumimoji="1" lang="zh-CN" altLang="en-US" dirty="0"/>
-              <a:t>很少时，</a:t>
-            </a:r>
-            <a:r>
-              <a:rPr kumimoji="1" lang="en-US" altLang="zh-CN" dirty="0"/>
-              <a:t>poi</a:t>
-            </a:r>
-            <a:r>
-              <a:rPr kumimoji="1" lang="zh-CN" altLang="en-US" dirty="0"/>
-              <a:t>中心影响更大。这是码字级稳定化，不是把每个</a:t>
-            </a:r>
-            <a:r>
-              <a:rPr kumimoji="1" lang="en-US" altLang="zh-CN" dirty="0"/>
-              <a:t>POI</a:t>
-            </a:r>
-            <a:r>
-              <a:rPr kumimoji="1" lang="zh-CN" altLang="en-US" dirty="0"/>
-              <a:t>和</a:t>
-            </a:r>
-            <a:r>
-              <a:rPr kumimoji="1" lang="en-US" altLang="zh-CN" dirty="0"/>
-              <a:t>Query</a:t>
-            </a:r>
-            <a:r>
-              <a:rPr kumimoji="1" lang="zh-CN" altLang="en-US" dirty="0"/>
-              <a:t>动态融合成一个向量</a:t>
-            </a:r>
-            <a:endParaRPr kumimoji="1" lang="en-US" altLang="zh-CN" dirty="0"/>
-          </a:p>
-          <a:p>
-            <a:endParaRPr kumimoji="1" lang="en-US" altLang="zh-CN" dirty="0"/>
-          </a:p>
-          <a:p>
             <a:endParaRPr kumimoji="1" lang="zh-CN" altLang="en-US" dirty="0"/>
           </a:p>
         </p:txBody>
@@ -3824,183 +2412,7 @@
           <a:bodyPr/>
           <a:lstStyle/>
           <a:p>
-            <a:r>
-              <a:rPr kumimoji="1" lang="zh-CN" altLang="en-US" dirty="0"/>
-              <a:t>类别能提供稳定的语义结构，但我们不要求一个类别只能对应一个码字，类别只是</a:t>
-            </a:r>
-            <a:r>
-              <a:rPr kumimoji="1" lang="en-US" altLang="zh-CN" dirty="0"/>
-              <a:t>assignment</a:t>
-            </a:r>
-            <a:r>
-              <a:rPr kumimoji="1" lang="zh-CN" altLang="en-US" dirty="0"/>
-              <a:t>的一个代价项，大类仍然可以根据内容和</a:t>
-            </a:r>
-            <a:r>
-              <a:rPr kumimoji="1" lang="en-US" altLang="zh-CN" dirty="0"/>
-              <a:t>Query</a:t>
-            </a:r>
-            <a:r>
-              <a:rPr kumimoji="1" lang="zh-CN" altLang="en-US" dirty="0"/>
-              <a:t>进一步拆分。</a:t>
-            </a:r>
-            <a:endParaRPr kumimoji="1" lang="en-US" altLang="zh-CN" dirty="0"/>
-          </a:p>
-          <a:p>
-            <a:endParaRPr kumimoji="1" lang="en-US" altLang="zh-CN" dirty="0"/>
-          </a:p>
-          <a:p>
-            <a:r>
-              <a:rPr kumimoji="1" lang="en-US" altLang="zh-CN" dirty="0"/>
-              <a:t>S1</a:t>
-            </a:r>
-            <a:r>
-              <a:rPr kumimoji="1" lang="zh-CN" altLang="en-US" dirty="0"/>
-              <a:t>类别概率，</a:t>
-            </a:r>
-            <a:r>
-              <a:rPr kumimoji="1" lang="en-US" altLang="zh-CN" dirty="0"/>
-              <a:t>n(</a:t>
-            </a:r>
-            <a:r>
-              <a:rPr kumimoji="1" lang="en-US" altLang="zh-CN" dirty="0" err="1"/>
-              <a:t>k,c</a:t>
-            </a:r>
-            <a:r>
-              <a:rPr kumimoji="1" lang="en-US" altLang="zh-CN" dirty="0"/>
-              <a:t>)</a:t>
-            </a:r>
-            <a:r>
-              <a:rPr kumimoji="1" lang="zh-CN" altLang="en-US" dirty="0"/>
-              <a:t>码字</a:t>
-            </a:r>
-            <a:r>
-              <a:rPr kumimoji="1" lang="en-US" altLang="zh-CN" dirty="0"/>
-              <a:t>k</a:t>
-            </a:r>
-            <a:r>
-              <a:rPr kumimoji="1" lang="zh-CN" altLang="en-US" dirty="0"/>
-              <a:t>中属于类别</a:t>
-            </a:r>
-            <a:r>
-              <a:rPr kumimoji="1" lang="en-US" altLang="zh-CN" dirty="0"/>
-              <a:t>c</a:t>
-            </a:r>
-            <a:r>
-              <a:rPr kumimoji="1" lang="zh-CN" altLang="en-US" dirty="0"/>
-              <a:t>的</a:t>
-            </a:r>
-            <a:r>
-              <a:rPr kumimoji="1" lang="en-US" altLang="zh-CN" dirty="0"/>
-              <a:t>poi</a:t>
-            </a:r>
-            <a:r>
-              <a:rPr kumimoji="1" lang="zh-CN" altLang="en-US" dirty="0"/>
-              <a:t>数，</a:t>
-            </a:r>
-            <a:r>
-              <a:rPr kumimoji="1" lang="en-US" altLang="zh-CN" dirty="0"/>
-              <a:t>n(k)</a:t>
-            </a:r>
-            <a:r>
-              <a:rPr kumimoji="1" lang="zh-CN" altLang="en-US" dirty="0"/>
-              <a:t>码字全部</a:t>
-            </a:r>
-            <a:r>
-              <a:rPr kumimoji="1" lang="en-US" altLang="zh-CN" dirty="0"/>
-              <a:t>poi</a:t>
-            </a:r>
-            <a:r>
-              <a:rPr kumimoji="1" lang="zh-CN" altLang="en-US" dirty="0"/>
-              <a:t>数，</a:t>
-            </a:r>
-            <a:r>
-              <a:rPr kumimoji="1" lang="en-US" altLang="zh-CN" dirty="0"/>
-              <a:t>P(c)</a:t>
-            </a:r>
-            <a:r>
-              <a:rPr kumimoji="1" lang="zh-CN" altLang="en-US" dirty="0"/>
-              <a:t>全库类别比例。</a:t>
-            </a:r>
-            <a:r>
-              <a:rPr kumimoji="1" lang="en-US" altLang="zh-CN" dirty="0"/>
-              <a:t>a1 = 32</a:t>
-            </a:r>
-            <a:r>
-              <a:rPr kumimoji="1" lang="zh-CN" altLang="en-US" dirty="0"/>
-              <a:t>平滑强度。平滑的作用是避免小桶偶然没有某个类别，就给这个类别零概率，无限代价。</a:t>
-            </a:r>
-            <a:endParaRPr kumimoji="1" lang="en-US" altLang="zh-CN" dirty="0"/>
-          </a:p>
-          <a:p>
-            <a:r>
-              <a:rPr kumimoji="1" lang="zh-CN" altLang="en-US" dirty="0"/>
-              <a:t>类别代价，目标类别在这个码字中越常见，代价越低。</a:t>
-            </a:r>
-            <a:br>
-              <a:rPr kumimoji="1" lang="en-US" altLang="zh-CN" dirty="0"/>
-            </a:br>
-            <a:endParaRPr kumimoji="1" lang="en-US" altLang="zh-CN" dirty="0"/>
-          </a:p>
-          <a:p>
-            <a:r>
-              <a:rPr kumimoji="1" lang="en-US" altLang="zh-CN" dirty="0"/>
-              <a:t>S2</a:t>
-            </a:r>
-            <a:r>
-              <a:rPr kumimoji="1" lang="zh-CN" altLang="en-US" dirty="0"/>
-              <a:t>要条件话，</a:t>
-            </a:r>
-            <a:r>
-              <a:rPr kumimoji="1" lang="en-US" altLang="zh-CN" dirty="0"/>
-              <a:t>S2</a:t>
-            </a:r>
-            <a:r>
-              <a:rPr kumimoji="1" lang="zh-CN" altLang="en-US" dirty="0"/>
-              <a:t>可以在不同</a:t>
-            </a:r>
-            <a:r>
-              <a:rPr kumimoji="1" lang="en-US" altLang="zh-CN" dirty="0"/>
-              <a:t>S1</a:t>
-            </a:r>
-            <a:r>
-              <a:rPr kumimoji="1" lang="zh-CN" altLang="en-US" dirty="0"/>
-              <a:t>下复用，所以要看完整</a:t>
-            </a:r>
-            <a:r>
-              <a:rPr kumimoji="1" lang="en-US" altLang="zh-CN" dirty="0"/>
-              <a:t>S1S2</a:t>
-            </a:r>
-            <a:r>
-              <a:rPr kumimoji="1" lang="zh-CN" altLang="en-US" dirty="0"/>
-              <a:t>路径，不能只统计</a:t>
-            </a:r>
-            <a:r>
-              <a:rPr kumimoji="1" lang="en-US" altLang="zh-CN" dirty="0"/>
-              <a:t>S2</a:t>
-            </a:r>
-            <a:r>
-              <a:rPr kumimoji="1" lang="zh-CN" altLang="en-US" dirty="0"/>
-              <a:t>编号属于什么类别</a:t>
-            </a:r>
-            <a:endParaRPr kumimoji="1" lang="en-US" altLang="zh-CN" dirty="0"/>
-          </a:p>
-          <a:p>
-            <a:endParaRPr kumimoji="1" lang="en-US" altLang="zh-CN" dirty="0"/>
-          </a:p>
-          <a:p>
-            <a:r>
-              <a:rPr kumimoji="1" lang="zh-CN" altLang="en-US" dirty="0"/>
-              <a:t>投影残差，</a:t>
-            </a:r>
-            <a:r>
-              <a:rPr kumimoji="1" lang="en-US" altLang="zh-CN" dirty="0" err="1"/>
-              <a:t>Proj</a:t>
-            </a:r>
-            <a:r>
-              <a:rPr kumimoji="1" lang="zh-CN" altLang="en-US" dirty="0"/>
-              <a:t>表示当前向量沿选中中心方向的分量。当前码本已经解释了这个方向，下一层就主要处理去掉该方向以后剩余的差别。</a:t>
-            </a:r>
+            <a:endParaRPr kumimoji="1" lang="zh-CN" altLang="en-US" dirty="0"/>
           </a:p>
         </p:txBody>
       </p:sp>
@@ -4219,7 +2631,7 @@
           <a:p>
             <a:fld id="{2BBF8015-DF84-41FA-9E94-BA51DE2E4658}" type="datetime1">
               <a:rPr lang="en-US" altLang="zh-CN" smtClean="0"/>
-              <a:t>9/16/26</a:t>
+              <a:t>9/17/26</a:t>
             </a:fld>
             <a:endParaRPr lang="en-US"/>
           </a:p>
@@ -4382,7 +2794,7 @@
           <a:p>
             <a:fld id="{EC862101-079D-4F99-B83B-6106A3082DC1}" type="datetime1">
               <a:rPr lang="en-US" altLang="zh-CN" smtClean="0"/>
-              <a:t>9/16/26</a:t>
+              <a:t>9/17/26</a:t>
             </a:fld>
             <a:endParaRPr lang="en-US"/>
           </a:p>
@@ -4555,7 +2967,7 @@
           <a:p>
             <a:fld id="{4C16800F-0336-42AD-AB4C-E188E73DB4FB}" type="datetime1">
               <a:rPr lang="en-US" altLang="zh-CN" smtClean="0"/>
-              <a:t>9/16/26</a:t>
+              <a:t>9/17/26</a:t>
             </a:fld>
             <a:endParaRPr lang="en-US"/>
           </a:p>
@@ -4946,7 +3358,7 @@
           <a:p>
             <a:fld id="{6633B06F-833C-4282-8B21-93F195BE9DCF}" type="datetime1">
               <a:rPr lang="en-US" altLang="zh-CN" smtClean="0"/>
-              <a:t>9/16/26</a:t>
+              <a:t>9/17/26</a:t>
             </a:fld>
             <a:endParaRPr lang="en-US"/>
           </a:p>
@@ -5186,7 +3598,7 @@
           <a:p>
             <a:fld id="{80521281-1D44-441C-9DDE-B4936627E1FE}" type="datetime1">
               <a:rPr lang="en-US" altLang="zh-CN" smtClean="0"/>
-              <a:t>9/16/26</a:t>
+              <a:t>9/17/26</a:t>
             </a:fld>
             <a:endParaRPr lang="en-US"/>
           </a:p>
@@ -5466,7 +3878,7 @@
           <a:p>
             <a:fld id="{E88997AF-337D-4308-80A8-0E4FAAFEF77A}" type="datetime1">
               <a:rPr lang="en-US" altLang="zh-CN" smtClean="0"/>
-              <a:t>9/16/26</a:t>
+              <a:t>9/17/26</a:t>
             </a:fld>
             <a:endParaRPr lang="en-US"/>
           </a:p>
@@ -5880,7 +4292,7 @@
           <a:p>
             <a:fld id="{5B80E11C-AF29-404B-84BD-C97916AD109A}" type="datetime1">
               <a:rPr lang="en-US" altLang="zh-CN" smtClean="0"/>
-              <a:t>9/16/26</a:t>
+              <a:t>9/17/26</a:t>
             </a:fld>
             <a:endParaRPr lang="en-US"/>
           </a:p>
@@ -5992,7 +4404,7 @@
           <a:p>
             <a:fld id="{6EF8B016-4D35-4FFA-AAB2-911F490527D3}" type="datetime1">
               <a:rPr lang="en-US" altLang="zh-CN" smtClean="0"/>
-              <a:t>9/16/26</a:t>
+              <a:t>9/17/26</a:t>
             </a:fld>
             <a:endParaRPr lang="en-US"/>
           </a:p>
@@ -6082,7 +4494,7 @@
           <a:p>
             <a:fld id="{7998FBFD-206E-4DB4-97C7-5AD8A1A0F586}" type="datetime1">
               <a:rPr lang="en-US" altLang="zh-CN" smtClean="0"/>
-              <a:t>9/16/26</a:t>
+              <a:t>9/17/26</a:t>
             </a:fld>
             <a:endParaRPr lang="en-US"/>
           </a:p>
@@ -6352,7 +4764,7 @@
           <a:p>
             <a:fld id="{8795EDB8-0579-4265-A8F4-6EA70868C754}" type="datetime1">
               <a:rPr lang="en-US" altLang="zh-CN" smtClean="0"/>
-              <a:t>9/16/26</a:t>
+              <a:t>9/17/26</a:t>
             </a:fld>
             <a:endParaRPr lang="en-US"/>
           </a:p>
@@ -6599,7 +5011,7 @@
           <a:p>
             <a:fld id="{93223B87-9435-4C0A-8A1E-F5BBFA32C3C5}" type="datetime1">
               <a:rPr lang="en-US" altLang="zh-CN" smtClean="0"/>
-              <a:t>9/16/26</a:t>
+              <a:t>9/17/26</a:t>
             </a:fld>
             <a:endParaRPr lang="en-US"/>
           </a:p>
@@ -6879,7 +5291,7 @@
           <a:p>
             <a:fld id="{863614C7-14EB-4084-AC4C-AAFA56794DEF}" type="datetime1">
               <a:rPr lang="en-US" altLang="zh-CN" smtClean="0"/>
-              <a:t>9/16/26</a:t>
+              <a:t>9/17/26</a:t>
             </a:fld>
             <a:endParaRPr lang="en-US"/>
           </a:p>
